--- a/llm/slides/Cap11.pptx
+++ b/llm/slides/Cap11.pptx
@@ -953,7 +953,7 @@
           <a:lstStyle/>
           <a:p>
             <a:r>
-              <a:t>O gerador é um programa de regras, não um LLM: para cada frase calcula a cobertura ponderada da pergunta, a raridade dos radicais em comum sobre a dos radicais da pergunta, e se abstém quando a melhor frase fica abaixo do limiar lambda. Para não ajustar o limiar nos mesmos dados em que medimos, dividimos as 56 consultas em DEV e TESTE, 28 cada. No DEV, com limiar até 0,3 o sistema responde a tudo e se abstém corretamente em só 40 por cento das perguntas sem resposta: ele alucina frases soltas do contexto. Com 0,5, a abstenção correta chega a 100 por cento e as respostas corretas ficam em 73,9. Acima disso, em 0,7, as respostas corretas caem a 52,2 por cento, porque o sistema passa a se abster de perguntas que tinham resposta. O critério, a média dos dois, é uma escolha de projeto: um serviço que prefira nunca inventar escolheria outro. Pergunta: qual critério você usaria?</a:t>
+              <a:t>O gerador é um programa de regras, não um LLM: para cada frase calcula a cobertura ponderada da pergunta, a raridade dos radicais em comum sobre a dos radicais da pergunta, e se abstém quando a melhor frase fica abaixo do limiar lambda. Para não ajustar o limiar nos mesmos dados em que medimos, dividimos as 56 consultas em DEV e TESTE, 28 cada. No DEV, com limiar até 0,3 o sistema responde a tudo e se abstém corretamente em só 40 por cento das perguntas sem resposta: ele alucina frases soltas do contexto. Com 0,5, a abstenção correta chega a 100 por cento e as respostas corretas ficam em 73,9. Em 0,7, as respostas corretas caem a 52,2 por cento: o sistema se abstém de perguntas que tinham resposta. O critério, a média dos dois, é escolha de projeto.</a:t>
             </a:r>
           </a:p>
         </p:txBody>
